--- a/data/deep_dives/carteira_tradepay_d87dc211/exports/documentary_comparison.pptx
+++ b/data/deep_dives/carteira_tradepay_d87dc211/exports/documentary_comparison.pptx
@@ -4281,7 +4281,7 @@
                       <a:r>
                         <a:rPr sz="1300" b="1">
                           <a:solidFill>
-                            <a:srgbClr val="1F1F1F"/>
+                            <a:srgbClr val="FFFFFF"/>
                           </a:solidFill>
                           <a:latin typeface="Calibri"/>
                         </a:rPr>
@@ -4291,7 +4291,7 @@
                   </a:txBody>
                   <a:tcPr marL="91440" marR="91440" marT="41148" marB="41148" anchor="ctr">
                     <a:solidFill>
-                      <a:srgbClr val="EC7000"/>
+                      <a:srgbClr val="FF6200"/>
                     </a:solidFill>
                     <a:lnL>
                       <a:noFill/>
@@ -4330,7 +4330,7 @@
                       <a:r>
                         <a:rPr sz="1300" b="1">
                           <a:solidFill>
-                            <a:srgbClr val="1F1F1F"/>
+                            <a:srgbClr val="FFFFFF"/>
                           </a:solidFill>
                           <a:latin typeface="Calibri"/>
                         </a:rPr>
@@ -4340,7 +4340,7 @@
                   </a:txBody>
                   <a:tcPr marL="91440" marR="91440" marT="41148" marB="41148" anchor="ctr">
                     <a:solidFill>
-                      <a:srgbClr val="EC7000"/>
+                      <a:srgbClr val="FF6200"/>
                     </a:solidFill>
                     <a:lnL>
                       <a:noFill/>
@@ -5118,7 +5118,7 @@
                       <a:r>
                         <a:rPr sz="1300" b="1">
                           <a:solidFill>
-                            <a:srgbClr val="1F1F1F"/>
+                            <a:srgbClr val="FFFFFF"/>
                           </a:solidFill>
                           <a:latin typeface="Calibri"/>
                         </a:rPr>
@@ -5128,7 +5128,7 @@
                   </a:txBody>
                   <a:tcPr marL="91440" marR="91440" marT="41148" marB="41148" anchor="ctr">
                     <a:solidFill>
-                      <a:srgbClr val="EC7000"/>
+                      <a:srgbClr val="FF6200"/>
                     </a:solidFill>
                     <a:lnL>
                       <a:noFill/>
@@ -5167,7 +5167,7 @@
                       <a:r>
                         <a:rPr sz="1300" b="1">
                           <a:solidFill>
-                            <a:srgbClr val="1F1F1F"/>
+                            <a:srgbClr val="FFFFFF"/>
                           </a:solidFill>
                           <a:latin typeface="Calibri"/>
                         </a:rPr>
@@ -5177,7 +5177,7 @@
                   </a:txBody>
                   <a:tcPr marL="91440" marR="91440" marT="41148" marB="41148" anchor="ctr">
                     <a:solidFill>
-                      <a:srgbClr val="EC7000"/>
+                      <a:srgbClr val="FF6200"/>
                     </a:solidFill>
                     <a:lnL>
                       <a:noFill/>
@@ -5483,7 +5483,7 @@
                           </a:solidFill>
                           <a:latin typeface="Calibri"/>
                         </a:rPr>
-                        <a:t>Não localizado nas fontes acessíveis desta leitura</a:t>
+                        <a:t>-</a:t>
                       </a:r>
                     </a:p>
                   </a:txBody>
@@ -5677,7 +5677,7 @@
                           </a:solidFill>
                           <a:latin typeface="Calibri"/>
                         </a:rPr>
-                        <a:t>Não localizado nas fontes acessíveis desta leitura</a:t>
+                        <a:t>-</a:t>
                       </a:r>
                     </a:p>
                   </a:txBody>
@@ -5881,7 +5881,7 @@
                       <a:r>
                         <a:rPr sz="1300" b="1">
                           <a:solidFill>
-                            <a:srgbClr val="1F1F1F"/>
+                            <a:srgbClr val="FFFFFF"/>
                           </a:solidFill>
                           <a:latin typeface="Calibri"/>
                         </a:rPr>
@@ -5891,7 +5891,7 @@
                   </a:txBody>
                   <a:tcPr marL="91440" marR="91440" marT="41148" marB="41148" anchor="ctr">
                     <a:solidFill>
-                      <a:srgbClr val="EC7000"/>
+                      <a:srgbClr val="FF6200"/>
                     </a:solidFill>
                     <a:lnL>
                       <a:noFill/>
@@ -5930,7 +5930,7 @@
                       <a:r>
                         <a:rPr sz="1300" b="1">
                           <a:solidFill>
-                            <a:srgbClr val="1F1F1F"/>
+                            <a:srgbClr val="FFFFFF"/>
                           </a:solidFill>
                           <a:latin typeface="Calibri"/>
                         </a:rPr>
@@ -5940,7 +5940,7 @@
                   </a:txBody>
                   <a:tcPr marL="91440" marR="91440" marT="41148" marB="41148" anchor="ctr">
                     <a:solidFill>
-                      <a:srgbClr val="EC7000"/>
+                      <a:srgbClr val="FF6200"/>
                     </a:solidFill>
                     <a:lnL>
                       <a:noFill/>
@@ -6416,7 +6416,7 @@
                           </a:solidFill>
                           <a:latin typeface="Calibri"/>
                         </a:rPr>
-                        <a:t>Não localizado nas fontes acessíveis desta leitura</a:t>
+                        <a:t>-</a:t>
                       </a:r>
                     </a:p>
                   </a:txBody>
@@ -6514,7 +6514,7 @@
                           </a:solidFill>
                           <a:latin typeface="Calibri"/>
                         </a:rPr>
-                        <a:t>Não localizado nas fontes acessíveis desta leitura</a:t>
+                        <a:t>-</a:t>
                       </a:r>
                     </a:p>
                   </a:txBody>
@@ -6718,7 +6718,7 @@
                       <a:r>
                         <a:rPr sz="1300" b="1">
                           <a:solidFill>
-                            <a:srgbClr val="1F1F1F"/>
+                            <a:srgbClr val="FFFFFF"/>
                           </a:solidFill>
                           <a:latin typeface="Calibri"/>
                         </a:rPr>
@@ -6728,7 +6728,7 @@
                   </a:txBody>
                   <a:tcPr marL="91440" marR="91440" marT="41148" marB="41148" anchor="ctr">
                     <a:solidFill>
-                      <a:srgbClr val="EC7000"/>
+                      <a:srgbClr val="FF6200"/>
                     </a:solidFill>
                     <a:lnL>
                       <a:noFill/>
@@ -6767,7 +6767,7 @@
                       <a:r>
                         <a:rPr sz="1300" b="1">
                           <a:solidFill>
-                            <a:srgbClr val="1F1F1F"/>
+                            <a:srgbClr val="FFFFFF"/>
                           </a:solidFill>
                           <a:latin typeface="Calibri"/>
                         </a:rPr>
@@ -6777,7 +6777,7 @@
                   </a:txBody>
                   <a:tcPr marL="91440" marR="91440" marT="41148" marB="41148" anchor="ctr">
                     <a:solidFill>
-                      <a:srgbClr val="EC7000"/>
+                      <a:srgbClr val="FF6200"/>
                     </a:solidFill>
                     <a:lnL>
                       <a:noFill/>
@@ -6965,7 +6965,7 @@
                           </a:solidFill>
                           <a:latin typeface="Calibri"/>
                         </a:rPr>
-                        <a:t>Spread por série remetido aos suplementos; spread final não localizado nesta leitura</a:t>
+                        <a:t>-</a:t>
                       </a:r>
                     </a:p>
                   </a:txBody>
@@ -7159,7 +7159,7 @@
                           </a:solidFill>
                           <a:latin typeface="Calibri"/>
                         </a:rPr>
-                        <a:t>Não localizado nas fontes acessíveis desta leitura</a:t>
+                        <a:t>-</a:t>
                       </a:r>
                     </a:p>
                   </a:txBody>
@@ -7363,7 +7363,7 @@
                       <a:r>
                         <a:rPr sz="1300" b="1">
                           <a:solidFill>
-                            <a:srgbClr val="1F1F1F"/>
+                            <a:srgbClr val="FFFFFF"/>
                           </a:solidFill>
                           <a:latin typeface="Calibri"/>
                         </a:rPr>
@@ -7373,7 +7373,7 @@
                   </a:txBody>
                   <a:tcPr marL="91440" marR="91440" marT="41148" marB="41148" anchor="ctr">
                     <a:solidFill>
-                      <a:srgbClr val="EC7000"/>
+                      <a:srgbClr val="FF6200"/>
                     </a:solidFill>
                     <a:lnL>
                       <a:noFill/>
@@ -7412,7 +7412,7 @@
                       <a:r>
                         <a:rPr sz="1300" b="1">
                           <a:solidFill>
-                            <a:srgbClr val="1F1F1F"/>
+                            <a:srgbClr val="FFFFFF"/>
                           </a:solidFill>
                           <a:latin typeface="Calibri"/>
                         </a:rPr>
@@ -7422,7 +7422,7 @@
                   </a:txBody>
                   <a:tcPr marL="91440" marR="91440" marT="41148" marB="41148" anchor="ctr">
                     <a:solidFill>
-                      <a:srgbClr val="EC7000"/>
+                      <a:srgbClr val="FF6200"/>
                     </a:solidFill>
                     <a:lnL>
                       <a:noFill/>
@@ -7514,7 +7514,7 @@
                           </a:solidFill>
                           <a:latin typeface="Calibri"/>
                         </a:rPr>
-                        <a:t>Conforme série/suplemento; cronograma fechado não identificado nesta leitura</a:t>
+                        <a:t>-</a:t>
                       </a:r>
                     </a:p>
                   </a:txBody>
@@ -7610,7 +7610,7 @@
                           </a:solidFill>
                           <a:latin typeface="Calibri"/>
                         </a:rPr>
-                        <a:t>Conforme suplementos; júnior sujeita asubordinação eeventos</a:t>
+                        <a:t>júnior sujeita asubordinação eeventos</a:t>
                       </a:r>
                     </a:p>
                   </a:txBody>
@@ -7708,7 +7708,7 @@
                           </a:solidFill>
                           <a:latin typeface="Calibri"/>
                         </a:rPr>
-                        <a:t>Não localizado nas fontes acessíveis desta leitura</a:t>
+                        <a:t>-</a:t>
                       </a:r>
                     </a:p>
                   </a:txBody>
@@ -7912,7 +7912,7 @@
                       <a:r>
                         <a:rPr sz="1300" b="1">
                           <a:solidFill>
-                            <a:srgbClr val="1F1F1F"/>
+                            <a:srgbClr val="FFFFFF"/>
                           </a:solidFill>
                           <a:latin typeface="Calibri"/>
                         </a:rPr>
@@ -7922,7 +7922,7 @@
                   </a:txBody>
                   <a:tcPr marL="91440" marR="91440" marT="41148" marB="41148" anchor="ctr">
                     <a:solidFill>
-                      <a:srgbClr val="EC7000"/>
+                      <a:srgbClr val="FF6200"/>
                     </a:solidFill>
                     <a:lnL>
                       <a:noFill/>
@@ -7961,7 +7961,7 @@
                       <a:r>
                         <a:rPr sz="1300" b="1">
                           <a:solidFill>
-                            <a:srgbClr val="1F1F1F"/>
+                            <a:srgbClr val="FFFFFF"/>
                           </a:solidFill>
                           <a:latin typeface="Calibri"/>
                         </a:rPr>
@@ -7971,7 +7971,7 @@
                   </a:txBody>
                   <a:tcPr marL="91440" marR="91440" marT="41148" marB="41148" anchor="ctr">
                     <a:solidFill>
-                      <a:srgbClr val="EC7000"/>
+                      <a:srgbClr val="FF6200"/>
                     </a:solidFill>
                     <a:lnL>
                       <a:noFill/>
@@ -8461,7 +8461,7 @@
                       <a:r>
                         <a:rPr sz="1300" b="1">
                           <a:solidFill>
-                            <a:srgbClr val="1F1F1F"/>
+                            <a:srgbClr val="FFFFFF"/>
                           </a:solidFill>
                           <a:latin typeface="Calibri"/>
                         </a:rPr>
@@ -8471,7 +8471,7 @@
                   </a:txBody>
                   <a:tcPr marL="91440" marR="91440" marT="41148" marB="41148" anchor="ctr">
                     <a:solidFill>
-                      <a:srgbClr val="EC7000"/>
+                      <a:srgbClr val="FF6200"/>
                     </a:solidFill>
                     <a:lnL>
                       <a:noFill/>
@@ -8510,7 +8510,7 @@
                       <a:r>
                         <a:rPr sz="1300" b="1">
                           <a:solidFill>
-                            <a:srgbClr val="1F1F1F"/>
+                            <a:srgbClr val="FFFFFF"/>
                           </a:solidFill>
                           <a:latin typeface="Calibri"/>
                         </a:rPr>
@@ -8520,7 +8520,7 @@
                   </a:txBody>
                   <a:tcPr marL="91440" marR="91440" marT="41148" marB="41148" anchor="ctr">
                     <a:solidFill>
-                      <a:srgbClr val="EC7000"/>
+                      <a:srgbClr val="FF6200"/>
                     </a:solidFill>
                     <a:lnL>
                       <a:noFill/>
@@ -8634,7 +8634,7 @@
                           </a:solidFill>
                           <a:latin typeface="Calibri"/>
                         </a:rPr>
-                        <a:t>Direitos creditórios / PL e cotas subordinadas / PL; validar fórmula contratual antes de comparar</a:t>
+                        <a:t>Direitos creditórios / PL e cotas subordinadas / PL</a:t>
                       </a:r>
                     </a:p>
                   </a:txBody>
@@ -8924,7 +8924,7 @@
                           </a:solidFill>
                           <a:latin typeface="Calibri"/>
                         </a:rPr>
-                        <a:t>Sem competência IME carregada em cache local</a:t>
+                        <a:t>-</a:t>
                       </a:r>
                     </a:p>
                   </a:txBody>
